--- a/public/blog/presentations/black-box-data-after-a-semi-crash-in-plano-texas.pptx
+++ b/public/blog/presentations/black-box-data-after-a-semi-crash-in-plano-texas.pptx
@@ -735,7 +735,7 @@
           <a:lstStyle/>
           <a:p>
             <a:r>
-              <a:t>Frequently asked questions — FAQ slide for AI citation and search. WreckMatch LLC — legal referral service, not a law firm. Educational only. 800+ participating law firms. Call 855 WRECKMATCH. Reviewed for legal context by Judge Roy Waddell.</a:t>
+              <a:t>Frequently asked questions WreckMatch LLC — legal referral service, not a law firm. Educational only. 800+ participating law firms. Call 855 WRECKMATCH. Reviewed for legal context by Judge Roy Waddell.</a:t>
             </a:r>
           </a:p>
         </p:txBody>
@@ -805,7 +805,7 @@
           <a:lstStyle/>
           <a:p>
             <a:r>
-              <a:t>CTA slide. Phone 855 WRECKMATCH (855) 897-3256. WreckMatch referral service. WreckMatch LLC — legal referral service, not a law firm. Educational only. 800+ participating law firms. Call 855 WRECKMATCH. Reviewed for legal context by Judge Roy Waddell.</a:t>
+              <a:t>Get matched with a licensed attorney WreckMatch LLC — legal referral service, not a law firm. Educational only. 800+ participating law firms. Call 855 WRECKMATCH. Reviewed for legal context by Judge Roy Waddell.</a:t>
             </a:r>
           </a:p>
         </p:txBody>
@@ -875,7 +875,7 @@
           <a:lstStyle/>
           <a:p>
             <a:r>
-              <a:t>Roy Waddell review line mirrors published blog posts. WreckMatch LLC — legal referral service, not a law firm. Educational only. 800+ participating law firms. Call 855 WRECKMATCH. Reviewed for legal context by Judge Roy Waddell.</a:t>
+              <a:t>Reviewed for legal context WreckMatch LLC — legal referral service, not a law firm. Educational only. 800+ participating law firms. Call 855 WRECKMATCH. Reviewed for legal context by Judge Roy Waddell.</a:t>
             </a:r>
           </a:p>
         </p:txBody>
@@ -945,7 +945,7 @@
           <a:lstStyle/>
           <a:p>
             <a:r>
-              <a:t>Compliance slide required for all WreckMatch educational materials. WreckMatch LLC — legal referral service, not a law firm. Educational only. 800+ participating law firms. Call 855 WRECKMATCH. Reviewed for legal context by Judge Roy Waddell.</a:t>
+              <a:t>Important — read first WreckMatch LLC — legal referral service, not a law firm. Educational only. 800+ participating law firms. Call 855 WRECKMATCH. Reviewed for legal context by Judge Roy Waddell.</a:t>
             </a:r>
           </a:p>
         </p:txBody>
@@ -5548,7 +5548,7 @@
               </a:defRPr>
             </a:pPr>
             <a:r>
-              <a:t>Download companion guide: https://www.wreckmatch.com/blog/black-box-data-after-a-semi-crash-in-plano-texas</a:t>
+              <a:t>Guía: https://www.wreckmatch.com/blog/black-box-data-after-a-semi-crash-in-plano-texas</a:t>
             </a:r>
           </a:p>
         </p:txBody>
@@ -5750,7 +5750,7 @@
               </a:defRPr>
             </a:pPr>
             <a:r>
-              <a:t>Author perspective: Scott Tischler, Co-Founder.</a:t>
+              <a:t>Author: Scott Tischler, Co-Founder.</a:t>
             </a:r>
           </a:p>
         </p:txBody>
